--- a/docs/presentation.pptx
+++ b/docs/presentation.pptx
@@ -8536,7 +8536,7 @@
         </p:nvSpPr>
         <p:spPr>
           <a:xfrm>
-            <a:off x="1243575" y="2636499"/>
+            <a:off x="1243525" y="2677824"/>
             <a:ext cx="4206300" cy="649200"/>
           </a:xfrm>
           <a:prstGeom prst="rect">
@@ -8897,7 +8897,7 @@
         </p:nvSpPr>
         <p:spPr>
           <a:xfrm>
-            <a:off x="1243575" y="3602587"/>
+            <a:off x="1243575" y="3612424"/>
             <a:ext cx="4206300" cy="649200"/>
           </a:xfrm>
           <a:prstGeom prst="rect">
@@ -9246,7 +9246,7 @@
         </p:nvSpPr>
         <p:spPr>
           <a:xfrm>
-            <a:off x="1243525" y="4442000"/>
+            <a:off x="1243525" y="4505900"/>
             <a:ext cx="4206300" cy="695100"/>
           </a:xfrm>
           <a:prstGeom prst="rect">
@@ -9631,7 +9631,7 @@
         </p:nvSpPr>
         <p:spPr>
           <a:xfrm>
-            <a:off x="1243575" y="5367550"/>
+            <a:off x="1243575" y="5436800"/>
             <a:ext cx="4206300" cy="649200"/>
           </a:xfrm>
           <a:prstGeom prst="rect">
@@ -9789,7 +9789,31 @@
                 <a:cs typeface="Calibri"/>
                 <a:sym typeface="Calibri"/>
               </a:rPr>
-              <a:t> dos resultados foram da equipa. Verificamos todo o codigo </a:t>
+              <a:t> dos resultados foram da equipa. Verificamos todo o </a:t>
+            </a:r>
+            <a:r>
+              <a:rPr lang="en-US" sz="1280">
+                <a:solidFill>
+                  <a:srgbClr val="93A1B5"/>
+                </a:solidFill>
+                <a:latin typeface="Calibri"/>
+                <a:ea typeface="Calibri"/>
+                <a:cs typeface="Calibri"/>
+                <a:sym typeface="Calibri"/>
+              </a:rPr>
+              <a:t>código</a:t>
+            </a:r>
+            <a:r>
+              <a:rPr b="0" i="0" lang="en-US" sz="1280" u="none" cap="none" strike="noStrike">
+                <a:solidFill>
+                  <a:srgbClr val="93A1B5"/>
+                </a:solidFill>
+                <a:latin typeface="Calibri"/>
+                <a:ea typeface="Calibri"/>
+                <a:cs typeface="Calibri"/>
+                <a:sym typeface="Calibri"/>
+              </a:rPr>
+              <a:t> </a:t>
             </a:r>
             <a:r>
               <a:rPr lang="en-US" sz="1280">
@@ -10112,7 +10136,7 @@
         </p:nvSpPr>
         <p:spPr>
           <a:xfrm>
-            <a:off x="1243525" y="1711100"/>
+            <a:off x="1243525" y="1783100"/>
             <a:ext cx="4206300" cy="649200"/>
           </a:xfrm>
           <a:prstGeom prst="rect">
@@ -10688,8 +10712,8 @@
         </p:nvSpPr>
         <p:spPr>
           <a:xfrm>
-            <a:off x="932688" y="2167128"/>
-            <a:ext cx="5212080" cy="457200"/>
+            <a:off x="972813" y="2107691"/>
+            <a:ext cx="5212200" cy="457200"/>
           </a:xfrm>
           <a:prstGeom prst="rect">
             <a:avLst/>
@@ -10752,7 +10776,7 @@
         <p:spPr>
           <a:xfrm>
             <a:off x="640080" y="2880360"/>
-            <a:ext cx="118872" cy="118872"/>
+            <a:ext cx="118800" cy="118800"/>
           </a:xfrm>
           <a:prstGeom prst="rect">
             <a:avLst/>
@@ -10794,8 +10818,8 @@
         </p:nvSpPr>
         <p:spPr>
           <a:xfrm>
-            <a:off x="932688" y="2770632"/>
-            <a:ext cx="5212080" cy="457200"/>
+            <a:off x="905200" y="2711182"/>
+            <a:ext cx="5212200" cy="457200"/>
           </a:xfrm>
           <a:prstGeom prst="rect">
             <a:avLst/>
@@ -10924,8 +10948,8 @@
         </p:nvSpPr>
         <p:spPr>
           <a:xfrm>
-            <a:off x="932688" y="3374136"/>
-            <a:ext cx="5212080" cy="457200"/>
+            <a:off x="972813" y="3308961"/>
+            <a:ext cx="5212200" cy="457200"/>
           </a:xfrm>
           <a:prstGeom prst="rect">
             <a:avLst/>
@@ -10965,7 +10989,31 @@
                 <a:cs typeface="Calibri"/>
                 <a:sym typeface="Calibri"/>
               </a:rPr>
-              <a:t>Descoberta de um vies direcional </a:t>
+              <a:t>Descoberta de um </a:t>
+            </a:r>
+            <a:r>
+              <a:rPr lang="en-US">
+                <a:solidFill>
+                  <a:srgbClr val="EAF0F7"/>
+                </a:solidFill>
+                <a:latin typeface="Calibri"/>
+                <a:ea typeface="Calibri"/>
+                <a:cs typeface="Calibri"/>
+                <a:sym typeface="Calibri"/>
+              </a:rPr>
+              <a:t>viés</a:t>
+            </a:r>
+            <a:r>
+              <a:rPr b="0" i="0" lang="en-US" sz="1400" u="none" cap="none" strike="noStrike">
+                <a:solidFill>
+                  <a:srgbClr val="EAF0F7"/>
+                </a:solidFill>
+                <a:latin typeface="Calibri"/>
+                <a:ea typeface="Calibri"/>
+                <a:cs typeface="Calibri"/>
+                <a:sym typeface="Calibri"/>
+              </a:rPr>
+              <a:t> direcional </a:t>
             </a:r>
             <a:r>
               <a:rPr lang="en-US">
@@ -11042,8 +11090,8 @@
         </p:nvSpPr>
         <p:spPr>
           <a:xfrm>
-            <a:off x="932688" y="3977640"/>
-            <a:ext cx="5212080" cy="457200"/>
+            <a:off x="972825" y="3906740"/>
+            <a:ext cx="5212200" cy="457200"/>
           </a:xfrm>
           <a:prstGeom prst="rect">
             <a:avLst/>
@@ -12060,7 +12108,7 @@
         </p:nvSpPr>
         <p:spPr>
           <a:xfrm>
-            <a:off x="640080" y="5102330"/>
+            <a:off x="640080" y="5577780"/>
             <a:ext cx="6400800" cy="548700"/>
           </a:xfrm>
           <a:prstGeom prst="rect">
@@ -12990,7 +13038,7 @@
                 <a:cs typeface="Calibri"/>
                 <a:sym typeface="Calibri"/>
               </a:rPr>
-              <a:t>Detectar</a:t>
+              <a:t>Detetar</a:t>
             </a:r>
             <a:r>
               <a:rPr b="0" i="0" lang="en-US" sz="1350" u="none" cap="none" strike="noStrike">
